--- a/Final Presentation.pptx
+++ b/Final Presentation.pptx
@@ -237,7 +237,7 @@
           <a:p>
             <a:fld id="{F223FF85-4E34-4546-B772-76DFA4A6051B}" type="datetimeFigureOut">
               <a:rPr lang="en-US" smtClean="0"/>
-              <a:t>5/4/2026</a:t>
+              <a:t>5/5/2026</a:t>
             </a:fld>
             <a:endParaRPr lang="en-US" dirty="0"/>
           </a:p>
@@ -414,7 +414,7 @@
           <a:p>
             <a:fld id="{1B5CC398-6116-4BD2-9FAD-9822FDA158BE}" type="datetimeFigureOut">
               <a:rPr lang="en-US" smtClean="0"/>
-              <a:t>5/4/2026</a:t>
+              <a:t>5/5/2026</a:t>
             </a:fld>
             <a:endParaRPr lang="en-US" dirty="0"/>
           </a:p>
@@ -989,7 +989,7 @@
           <a:p>
             <a:fld id="{59722DCF-3C86-4CA9-A79C-7A01DC917267}" type="datetime1">
               <a:rPr lang="en-US" smtClean="0"/>
-              <a:t>5/4/2026</a:t>
+              <a:t>5/5/2026</a:t>
             </a:fld>
             <a:endParaRPr lang="en-US" dirty="0"/>
           </a:p>
@@ -1222,7 +1222,7 @@
           <a:p>
             <a:fld id="{98E2C3C3-8EE0-4646-AF47-12E3116D59C3}" type="datetime1">
               <a:rPr lang="en-US" smtClean="0"/>
-              <a:t>5/4/2026</a:t>
+              <a:t>5/5/2026</a:t>
             </a:fld>
             <a:endParaRPr lang="en-US" dirty="0"/>
           </a:p>
@@ -1395,7 +1395,7 @@
           <a:p>
             <a:fld id="{ED252E1C-7EB3-405E-81B2-32E332CACA0F}" type="datetime1">
               <a:rPr lang="en-US" smtClean="0"/>
-              <a:t>5/4/2026</a:t>
+              <a:t>5/5/2026</a:t>
             </a:fld>
             <a:endParaRPr lang="en-US" dirty="0"/>
           </a:p>
@@ -1647,7 +1647,7 @@
           <a:p>
             <a:fld id="{1FE93670-5DDA-427C-9657-21A216413B90}" type="datetime1">
               <a:rPr lang="en-US" smtClean="0"/>
-              <a:t>5/4/2026</a:t>
+              <a:t>5/5/2026</a:t>
             </a:fld>
             <a:endParaRPr lang="en-US" dirty="0"/>
           </a:p>
@@ -2004,7 +2004,7 @@
           <a:p>
             <a:fld id="{88F73B11-D0F5-4A08-A19E-C560E2C4116F}" type="datetime1">
               <a:rPr lang="en-US" smtClean="0"/>
-              <a:t>5/4/2026</a:t>
+              <a:t>5/5/2026</a:t>
             </a:fld>
             <a:endParaRPr lang="en-US" dirty="0"/>
           </a:p>
@@ -2356,7 +2356,7 @@
           <a:p>
             <a:fld id="{04761C04-CC91-4AAF-9006-A3A27BF33173}" type="datetime1">
               <a:rPr lang="en-US" smtClean="0"/>
-              <a:t>5/4/2026</a:t>
+              <a:t>5/5/2026</a:t>
             </a:fld>
             <a:endParaRPr lang="en-US" dirty="0"/>
           </a:p>
@@ -2596,7 +2596,7 @@
           <a:p>
             <a:fld id="{105EDACB-E986-4E04-ADB1-8913384D68D3}" type="datetime1">
               <a:rPr lang="en-US" smtClean="0"/>
-              <a:t>5/4/2026</a:t>
+              <a:t>5/5/2026</a:t>
             </a:fld>
             <a:endParaRPr lang="en-US" dirty="0"/>
           </a:p>
@@ -2815,7 +2815,7 @@
           <a:p>
             <a:fld id="{FC338E35-CB21-4D15-A87F-675D4C9EDCA4}" type="datetime1">
               <a:rPr lang="en-US" smtClean="0"/>
-              <a:t>5/4/2026</a:t>
+              <a:t>5/5/2026</a:t>
             </a:fld>
             <a:endParaRPr lang="en-US" dirty="0"/>
           </a:p>
@@ -3034,7 +3034,7 @@
           <a:p>
             <a:fld id="{E71CA9EE-AFE9-47E0-9F22-915E0A45E5AF}" type="datetime1">
               <a:rPr lang="en-US" smtClean="0"/>
-              <a:t>5/4/2026</a:t>
+              <a:t>5/5/2026</a:t>
             </a:fld>
             <a:endParaRPr lang="en-US" dirty="0"/>
           </a:p>
@@ -3258,7 +3258,7 @@
           <a:p>
             <a:fld id="{7C504BF7-6B14-4333-B52B-ADBC1BCF47B5}" type="datetime1">
               <a:rPr lang="en-US" smtClean="0"/>
-              <a:t>5/4/2026</a:t>
+              <a:t>5/5/2026</a:t>
             </a:fld>
             <a:endParaRPr lang="en-US" dirty="0"/>
           </a:p>
@@ -3524,7 +3524,7 @@
           <a:p>
             <a:fld id="{C1C21BA4-3737-442B-A21A-11EEBBB51C57}" type="datetime1">
               <a:rPr lang="en-US" smtClean="0"/>
-              <a:t>5/4/2026</a:t>
+              <a:t>5/5/2026</a:t>
             </a:fld>
             <a:endParaRPr lang="en-US" dirty="0"/>
           </a:p>
@@ -3669,7 +3669,7 @@
           <a:p>
             <a:fld id="{092815CB-5A42-4381-B4B5-1F0A0AD684E0}" type="datetime1">
               <a:rPr lang="en-US" smtClean="0"/>
-              <a:t>5/4/2026</a:t>
+              <a:t>5/5/2026</a:t>
             </a:fld>
             <a:endParaRPr lang="en-US" dirty="0"/>
           </a:p>
@@ -3882,7 +3882,7 @@
           <a:p>
             <a:fld id="{8EF3DE08-A0D1-4FD8-A862-5499266B124D}" type="datetime1">
               <a:rPr lang="en-US" smtClean="0"/>
-              <a:t>5/4/2026</a:t>
+              <a:t>5/5/2026</a:t>
             </a:fld>
             <a:endParaRPr lang="en-US" dirty="0"/>
           </a:p>
@@ -4205,7 +4205,7 @@
           <a:p>
             <a:fld id="{6C5A15EF-D72C-40D5-8663-2C77F9B42EC1}" type="datetime1">
               <a:rPr lang="en-US" smtClean="0"/>
-              <a:t>5/4/2026</a:t>
+              <a:t>5/5/2026</a:t>
             </a:fld>
             <a:endParaRPr lang="en-US" dirty="0"/>
           </a:p>
@@ -4528,7 +4528,7 @@
           <a:p>
             <a:fld id="{D56F8A71-DDE0-43CA-81C3-EA9C4963E6AE}" type="datetime1">
               <a:rPr lang="en-US" smtClean="0"/>
-              <a:t>5/4/2026</a:t>
+              <a:t>5/5/2026</a:t>
             </a:fld>
             <a:endParaRPr lang="en-US" dirty="0"/>
           </a:p>
@@ -4803,7 +4803,7 @@
           <a:p>
             <a:fld id="{E525A034-19B5-40C2-A08C-916D805B8A45}" type="datetime1">
               <a:rPr lang="en-US" smtClean="0"/>
-              <a:t>5/4/2026</a:t>
+              <a:t>5/5/2026</a:t>
             </a:fld>
             <a:endParaRPr lang="en-US" dirty="0"/>
           </a:p>
@@ -5093,7 +5093,7 @@
           <a:p>
             <a:fld id="{D2C5EE04-1B51-44BB-A7D3-16AEE79C4983}" type="datetime1">
               <a:rPr lang="en-US" smtClean="0"/>
-              <a:t>5/4/2026</a:t>
+              <a:t>5/5/2026</a:t>
             </a:fld>
             <a:endParaRPr lang="en-US" dirty="0"/>
           </a:p>
@@ -5382,7 +5382,7 @@
           <a:p>
             <a:fld id="{E79D7598-9667-4FA1-B20E-133F7DF30C66}" type="datetime1">
               <a:rPr lang="en-US" smtClean="0"/>
-              <a:t>5/4/2026</a:t>
+              <a:t>5/5/2026</a:t>
             </a:fld>
             <a:endParaRPr lang="en-US" dirty="0"/>
           </a:p>
@@ -5682,7 +5682,7 @@
           <a:p>
             <a:fld id="{E0F4D2D3-E754-452C-996E-A69280848F28}" type="datetime1">
               <a:rPr lang="en-US" smtClean="0"/>
-              <a:t>5/4/2026</a:t>
+              <a:t>5/5/2026</a:t>
             </a:fld>
             <a:endParaRPr lang="en-US" dirty="0"/>
           </a:p>
@@ -5963,7 +5963,7 @@
           <a:p>
             <a:fld id="{17A20D89-EAE3-437D-A562-62F383E1F1E4}" type="datetime1">
               <a:rPr lang="en-US" smtClean="0"/>
-              <a:t>5/4/2026</a:t>
+              <a:t>5/5/2026</a:t>
             </a:fld>
             <a:endParaRPr lang="en-US" dirty="0"/>
           </a:p>
@@ -6247,7 +6247,7 @@
           <a:p>
             <a:fld id="{D481F196-B1D0-4451-BD57-0DCCBF9A6C9D}" type="datetime1">
               <a:rPr lang="en-US" smtClean="0"/>
-              <a:t>5/4/2026</a:t>
+              <a:t>5/5/2026</a:t>
             </a:fld>
             <a:endParaRPr lang="en-US" dirty="0"/>
           </a:p>
@@ -6602,7 +6602,7 @@
           <a:p>
             <a:fld id="{E2505D57-3CC9-48CD-A7D7-2BE3E605D0A5}" type="datetime1">
               <a:rPr lang="en-US" smtClean="0"/>
-              <a:t>5/4/2026</a:t>
+              <a:t>5/5/2026</a:t>
             </a:fld>
             <a:endParaRPr lang="en-US" dirty="0"/>
           </a:p>
@@ -6992,7 +6992,7 @@
           <a:p>
             <a:fld id="{26D2EC77-EDF2-486F-BC40-B49DAB22DB64}" type="datetime1">
               <a:rPr lang="en-US" smtClean="0"/>
-              <a:t>5/4/2026</a:t>
+              <a:t>5/5/2026</a:t>
             </a:fld>
             <a:endParaRPr lang="en-US" dirty="0"/>
           </a:p>
@@ -7216,7 +7216,7 @@
           <a:p>
             <a:fld id="{3F2E167B-0B78-4B36-8A57-49085AADF134}" type="datetime1">
               <a:rPr lang="en-US" smtClean="0"/>
-              <a:t>5/4/2026</a:t>
+              <a:t>5/5/2026</a:t>
             </a:fld>
             <a:endParaRPr lang="en-US" dirty="0"/>
           </a:p>
@@ -7510,7 +7510,7 @@
           <a:p>
             <a:fld id="{B9462E82-6E33-4AEF-AE7B-DF7C6F462D56}" type="datetime1">
               <a:rPr lang="en-US" smtClean="0"/>
-              <a:t>5/4/2026</a:t>
+              <a:t>5/5/2026</a:t>
             </a:fld>
             <a:endParaRPr lang="en-US" dirty="0"/>
           </a:p>
@@ -7804,7 +7804,7 @@
           <a:p>
             <a:fld id="{83BF6E84-C156-49F4-8E82-3F8A64544B22}" type="datetime1">
               <a:rPr lang="en-US" smtClean="0"/>
-              <a:t>5/4/2026</a:t>
+              <a:t>5/5/2026</a:t>
             </a:fld>
             <a:endParaRPr lang="en-US" dirty="0"/>
           </a:p>
@@ -8150,7 +8150,7 @@
           <a:p>
             <a:fld id="{001F9C0A-11C5-40F2-BD0E-27AA70E2625D}" type="datetime1">
               <a:rPr lang="en-US" smtClean="0"/>
-              <a:t>5/4/2026</a:t>
+              <a:t>5/5/2026</a:t>
             </a:fld>
             <a:endParaRPr lang="en-US" dirty="0"/>
           </a:p>
@@ -8475,7 +8475,7 @@
           <a:p>
             <a:fld id="{9CDFB84F-677F-480D-99C2-22BB3A82E4AD}" type="datetime1">
               <a:rPr lang="en-US" smtClean="0"/>
-              <a:t>5/4/2026</a:t>
+              <a:t>5/5/2026</a:t>
             </a:fld>
             <a:endParaRPr lang="en-US" dirty="0"/>
           </a:p>
@@ -8800,7 +8800,7 @@
           <a:p>
             <a:fld id="{1C640349-FC90-47D1-9F46-4D34EA792223}" type="datetime1">
               <a:rPr lang="en-US" smtClean="0"/>
-              <a:t>5/4/2026</a:t>
+              <a:t>5/5/2026</a:t>
             </a:fld>
             <a:endParaRPr lang="en-US" dirty="0"/>
           </a:p>
@@ -9126,7 +9126,7 @@
           <a:p>
             <a:fld id="{48587C5F-6A61-4864-9518-A5514F3191A0}" type="datetime1">
               <a:rPr lang="en-US" smtClean="0"/>
-              <a:t>5/4/2026</a:t>
+              <a:t>5/5/2026</a:t>
             </a:fld>
             <a:endParaRPr lang="en-US" dirty="0"/>
           </a:p>
@@ -9392,7 +9392,7 @@
           <a:p>
             <a:fld id="{9B95669B-9B51-4A21-90C8-BB2E110B3FD6}" type="datetime1">
               <a:rPr lang="en-US" smtClean="0"/>
-              <a:t>5/4/2026</a:t>
+              <a:t>5/5/2026</a:t>
             </a:fld>
             <a:endParaRPr lang="en-US" dirty="0"/>
           </a:p>
@@ -9657,7 +9657,7 @@
           <a:p>
             <a:fld id="{524A6D49-9F84-4D2B-BCDD-C2F0AED64BFE}" type="datetime1">
               <a:rPr lang="en-US" smtClean="0"/>
-              <a:t>5/4/2026</a:t>
+              <a:t>5/5/2026</a:t>
             </a:fld>
             <a:endParaRPr lang="en-US" dirty="0"/>
           </a:p>
@@ -10003,7 +10003,7 @@
           <a:p>
             <a:fld id="{275F2D28-3585-40CA-9EB9-F9971C1AA1E0}" type="datetime1">
               <a:rPr lang="en-US" smtClean="0"/>
-              <a:t>5/4/2026</a:t>
+              <a:t>5/5/2026</a:t>
             </a:fld>
             <a:endParaRPr lang="en-US" dirty="0"/>
           </a:p>
@@ -10357,7 +10357,7 @@
           <a:p>
             <a:fld id="{162E3648-85D4-4FD7-B855-79C521A61C61}" type="datetime1">
               <a:rPr lang="en-US" smtClean="0"/>
-              <a:t>5/4/2026</a:t>
+              <a:t>5/5/2026</a:t>
             </a:fld>
             <a:endParaRPr lang="en-US" dirty="0"/>
           </a:p>
@@ -10660,7 +10660,7 @@
           <a:p>
             <a:fld id="{E73000B7-56E6-4A26-8487-963BD31161AF}" type="datetime1">
               <a:rPr lang="en-US" smtClean="0"/>
-              <a:t>5/4/2026</a:t>
+              <a:t>5/5/2026</a:t>
             </a:fld>
             <a:endParaRPr lang="en-US" dirty="0"/>
           </a:p>
@@ -10894,7 +10894,7 @@
           <a:p>
             <a:fld id="{6C671BD4-4E81-464B-A994-00077AEC80C3}" type="datetime1">
               <a:rPr lang="en-US" smtClean="0"/>
-              <a:t>5/4/2026</a:t>
+              <a:t>5/5/2026</a:t>
             </a:fld>
             <a:endParaRPr lang="en-US" dirty="0"/>
           </a:p>
@@ -11115,7 +11115,7 @@
           <a:p>
             <a:fld id="{78216DC3-F1E3-4679-A7A7-118C827BFDD8}" type="datetime1">
               <a:rPr lang="en-US" smtClean="0"/>
-              <a:t>5/4/2026</a:t>
+              <a:t>5/5/2026</a:t>
             </a:fld>
             <a:endParaRPr lang="en-US" dirty="0"/>
           </a:p>
@@ -11342,7 +11342,7 @@
           <a:p>
             <a:fld id="{2D412A9A-F88E-45C5-903F-2119D36A77A2}" type="datetime1">
               <a:rPr lang="en-US" smtClean="0"/>
-              <a:t>5/4/2026</a:t>
+              <a:t>5/5/2026</a:t>
             </a:fld>
             <a:endParaRPr lang="en-US" dirty="0"/>
           </a:p>
@@ -11645,7 +11645,7 @@
           <a:p>
             <a:fld id="{CC9AC46E-311C-49B6-8A0E-D2095F2328AF}" type="datetime1">
               <a:rPr lang="en-US" smtClean="0"/>
-              <a:t>5/4/2026</a:t>
+              <a:t>5/5/2026</a:t>
             </a:fld>
             <a:endParaRPr lang="en-US" dirty="0"/>
           </a:p>
@@ -11945,7 +11945,7 @@
           <a:p>
             <a:fld id="{0C4F10A1-07E0-4636-B3BE-AE66FBE8467A}" type="datetime1">
               <a:rPr lang="en-US" smtClean="0"/>
-              <a:t>5/4/2026</a:t>
+              <a:t>5/5/2026</a:t>
             </a:fld>
             <a:endParaRPr lang="en-US" dirty="0"/>
           </a:p>
@@ -12256,7 +12256,7 @@
           <a:p>
             <a:fld id="{567E4DBA-3642-44F7-A1E0-3D9BCA1A53C6}" type="datetime1">
               <a:rPr lang="en-US" smtClean="0"/>
-              <a:t>5/4/2026</a:t>
+              <a:t>5/5/2026</a:t>
             </a:fld>
             <a:endParaRPr lang="en-US" dirty="0"/>
           </a:p>
@@ -12491,7 +12491,7 @@
           <a:p>
             <a:fld id="{5F8CD485-684D-4C35-BDF2-D991DF8FFCA1}" type="datetime1">
               <a:rPr lang="en-US" smtClean="0"/>
-              <a:t>5/4/2026</a:t>
+              <a:t>5/5/2026</a:t>
             </a:fld>
             <a:endParaRPr lang="en-US" dirty="0"/>
           </a:p>
@@ -12732,7 +12732,7 @@
           <a:p>
             <a:fld id="{3CE2A531-A855-4FC2-83C9-7F8A2FC0A7A9}" type="datetime1">
               <a:rPr lang="en-US" smtClean="0"/>
-              <a:t>5/4/2026</a:t>
+              <a:t>5/5/2026</a:t>
             </a:fld>
             <a:endParaRPr lang="en-US" dirty="0"/>
           </a:p>
@@ -12945,7 +12945,7 @@
           <a:p>
             <a:fld id="{AF101B9D-4D4C-40F1-8133-7CADC817E0C1}" type="datetime1">
               <a:rPr lang="en-US" smtClean="0"/>
-              <a:t>5/4/2026</a:t>
+              <a:t>5/5/2026</a:t>
             </a:fld>
             <a:endParaRPr lang="en-US" dirty="0"/>
           </a:p>
@@ -13289,7 +13289,7 @@
           <a:p>
             <a:fld id="{047E6C56-E35A-43C4-BAC8-C635905FE141}" type="datetime1">
               <a:rPr lang="en-US" smtClean="0"/>
-              <a:t>5/4/2026</a:t>
+              <a:t>5/5/2026</a:t>
             </a:fld>
             <a:endParaRPr lang="en-US" dirty="0"/>
           </a:p>
@@ -13560,7 +13560,7 @@
           <a:p>
             <a:fld id="{F5FF4366-C1D4-4687-A56C-18AD97870CFF}" type="datetime1">
               <a:rPr lang="en-US" smtClean="0"/>
-              <a:t>5/4/2026</a:t>
+              <a:t>5/5/2026</a:t>
             </a:fld>
             <a:endParaRPr lang="en-US" dirty="0"/>
           </a:p>
@@ -13988,7 +13988,7 @@
           <a:p>
             <a:fld id="{F5260159-51DF-49CB-B647-76DC93F9005D}" type="datetime1">
               <a:rPr lang="en-US" smtClean="0"/>
-              <a:t>5/4/2026</a:t>
+              <a:t>5/5/2026</a:t>
             </a:fld>
             <a:endParaRPr lang="en-US" dirty="0"/>
           </a:p>
@@ -14104,7 +14104,7 @@
           <a:p>
             <a:fld id="{D90B478A-2183-4725-BFFE-F5022B99B7BE}" type="datetime1">
               <a:rPr lang="en-US" smtClean="0"/>
-              <a:t>5/4/2026</a:t>
+              <a:t>5/5/2026</a:t>
             </a:fld>
             <a:endParaRPr lang="en-US" dirty="0"/>
           </a:p>
@@ -14260,7 +14260,7 @@
           <a:p>
             <a:fld id="{D9407116-79D5-4961-A943-953BCFEA97DD}" type="datetime1">
               <a:rPr lang="en-US" smtClean="0"/>
-              <a:t>5/4/2026</a:t>
+              <a:t>5/5/2026</a:t>
             </a:fld>
             <a:endParaRPr lang="en-US" dirty="0"/>
           </a:p>
@@ -14570,7 +14570,7 @@
           <a:p>
             <a:fld id="{DF55BE2D-D64B-4B05-B6D8-FA0500749FF9}" type="datetime1">
               <a:rPr lang="en-US" smtClean="0"/>
-              <a:t>5/4/2026</a:t>
+              <a:t>5/5/2026</a:t>
             </a:fld>
             <a:endParaRPr lang="en-US" dirty="0"/>
           </a:p>
@@ -14893,7 +14893,7 @@
           <a:p>
             <a:fld id="{7ABD5A60-72B7-4332-B4B3-40B2CC6142CE}" type="datetime1">
               <a:rPr lang="en-US" smtClean="0"/>
-              <a:t>5/4/2026</a:t>
+              <a:t>5/5/2026</a:t>
             </a:fld>
             <a:endParaRPr lang="en-US" dirty="0"/>
           </a:p>
@@ -15187,7 +15187,7 @@
           <a:p>
             <a:fld id="{7DE2B004-0AA0-4203-BDB3-16A698CB99F9}" type="datetime1">
               <a:rPr lang="en-US" smtClean="0"/>
-              <a:t>5/4/2026</a:t>
+              <a:t>5/5/2026</a:t>
             </a:fld>
             <a:endParaRPr lang="en-US" dirty="0"/>
           </a:p>
@@ -15519,7 +15519,7 @@
           <a:p>
             <a:fld id="{111FFCFE-B194-4E5A-862C-339E8FEE7136}" type="datetime1">
               <a:rPr lang="en-US" smtClean="0"/>
-              <a:t>5/4/2026</a:t>
+              <a:t>5/5/2026</a:t>
             </a:fld>
             <a:endParaRPr lang="en-US" dirty="0"/>
           </a:p>
@@ -15791,7 +15791,7 @@
           <a:p>
             <a:fld id="{31CEBACA-C806-48AD-B735-075EFFDC0FB5}" type="datetime1">
               <a:rPr lang="en-US" smtClean="0"/>
-              <a:t>5/4/2026</a:t>
+              <a:t>5/5/2026</a:t>
             </a:fld>
             <a:endParaRPr lang="en-US" dirty="0"/>
           </a:p>
@@ -16011,7 +16011,7 @@
           <a:p>
             <a:fld id="{28F25336-016D-4162-B545-E54B089028A6}" type="datetime1">
               <a:rPr lang="en-US" smtClean="0"/>
-              <a:t>5/4/2026</a:t>
+              <a:t>5/5/2026</a:t>
             </a:fld>
             <a:endParaRPr lang="en-US" dirty="0"/>
           </a:p>
@@ -16266,7 +16266,7 @@
           <a:p>
             <a:fld id="{8CD4DBA1-4626-47FC-856E-159D7E28D490}" type="datetime1">
               <a:rPr lang="en-US" smtClean="0"/>
-              <a:t>5/4/2026</a:t>
+              <a:t>5/5/2026</a:t>
             </a:fld>
             <a:endParaRPr lang="en-US" dirty="0"/>
           </a:p>
@@ -16532,7 +16532,7 @@
           <a:p>
             <a:fld id="{135AEAE7-3C36-4273-AC18-E54349BDD515}" type="datetime1">
               <a:rPr lang="en-US" smtClean="0"/>
-              <a:t>5/4/2026</a:t>
+              <a:t>5/5/2026</a:t>
             </a:fld>
             <a:endParaRPr lang="en-US" dirty="0"/>
           </a:p>
@@ -17302,7 +17302,7 @@
         </p:nvSpPr>
         <p:spPr bwMode="auto">
           <a:xfrm>
-            <a:off x="609600" y="1345712"/>
+            <a:off x="734825" y="1720840"/>
             <a:ext cx="5356258" cy="3416320"/>
           </a:xfrm>
           <a:prstGeom prst="rect">
@@ -17639,6 +17639,22 @@
               </a:rPr>
               <a:t>SVC </a:t>
             </a:r>
+            <a:r>
+              <a:rPr lang="en-US" altLang="en-US" sz="1800" dirty="0">
+                <a:latin typeface="Arial" panose="020B0604020202020204" pitchFamily="34" charset="0"/>
+              </a:rPr>
+              <a:t>(simplified linear version)</a:t>
+            </a:r>
+            <a:endParaRPr kumimoji="0" lang="en-US" altLang="en-US" sz="1800" b="0" i="0" u="none" strike="noStrike" cap="none" normalizeH="0" baseline="0" dirty="0">
+              <a:ln>
+                <a:noFill/>
+              </a:ln>
+              <a:solidFill>
+                <a:schemeClr val="tx1"/>
+              </a:solidFill>
+              <a:effectLst/>
+              <a:latin typeface="Arial" panose="020B0604020202020204" pitchFamily="34" charset="0"/>
+            </a:endParaRPr>
           </a:p>
           <a:p>
             <a:pPr marL="0" marR="0" lvl="0" indent="0" algn="l" defTabSz="914400" rtl="0" eaLnBrk="0" fontAlgn="base" latinLnBrk="0" hangingPunct="0">
@@ -17711,7 +17727,7 @@
         </p:nvSpPr>
         <p:spPr>
           <a:xfrm>
-            <a:off x="6743699" y="2133600"/>
+            <a:off x="7010400" y="2590800"/>
             <a:ext cx="4114800" cy="2031325"/>
           </a:xfrm>
           <a:prstGeom prst="rect">
@@ -17904,10 +17920,10 @@
       </p:sp>
       <p:sp>
         <p:nvSpPr>
-          <p:cNvPr id="4" name="Rectangle 1">
-            <a:extLst>
-              <a:ext uri="{FF2B5EF4-FFF2-40B4-BE49-F238E27FC236}">
-                <a16:creationId xmlns:a16="http://schemas.microsoft.com/office/drawing/2014/main" id="{4A5919A7-B8BB-905F-7D4C-CF23A3CCCEBC}"/>
+          <p:cNvPr id="5" name="Rectangle 2">
+            <a:extLst>
+              <a:ext uri="{FF2B5EF4-FFF2-40B4-BE49-F238E27FC236}">
+                <a16:creationId xmlns:a16="http://schemas.microsoft.com/office/drawing/2014/main" id="{B8855AFF-2897-4936-460F-0A6C0F7BE12E}"/>
               </a:ext>
             </a:extLst>
           </p:cNvPr>
@@ -17920,8 +17936,8 @@
         </p:nvSpPr>
         <p:spPr bwMode="auto">
           <a:xfrm>
-            <a:off x="990600" y="1582340"/>
-            <a:ext cx="5763116" cy="3693319"/>
+            <a:off x="762000" y="1600200"/>
+            <a:ext cx="5867400" cy="4247317"/>
           </a:xfrm>
           <a:prstGeom prst="rect">
             <a:avLst/>
@@ -17961,7 +17977,7 @@
           </a:extLst>
         </p:spPr>
         <p:txBody>
-          <a:bodyPr vert="horz" wrap="none" lIns="91440" tIns="45720" rIns="91440" bIns="45720" numCol="1" anchor="ctr" anchorCtr="0" compatLnSpc="1">
+          <a:bodyPr vert="horz" wrap="square" lIns="91440" tIns="45720" rIns="91440" bIns="45720" numCol="1" anchor="ctr" anchorCtr="0" compatLnSpc="1">
             <a:prstTxWarp prst="textNoShape">
               <a:avLst/>
             </a:prstTxWarp>
@@ -17985,19 +18001,6 @@
               <a:tabLst/>
             </a:pPr>
             <a:r>
-              <a:rPr kumimoji="0" lang="en-US" altLang="en-US" sz="1800" b="0" i="0" u="none" strike="noStrike" cap="none" normalizeH="0" baseline="0" dirty="0">
-                <a:ln>
-                  <a:noFill/>
-                </a:ln>
-                <a:solidFill>
-                  <a:schemeClr val="tx1"/>
-                </a:solidFill>
-                <a:effectLst/>
-                <a:latin typeface="Arial" panose="020B0604020202020204" pitchFamily="34" charset="0"/>
-              </a:rPr>
-              <a:t>Best Model: </a:t>
-            </a:r>
-            <a:r>
               <a:rPr kumimoji="0" lang="en-US" altLang="en-US" sz="1800" b="1" i="0" u="none" strike="noStrike" cap="none" normalizeH="0" baseline="0" dirty="0" err="1">
                 <a:ln>
                   <a:noFill/>
@@ -18011,6 +18014,25 @@
               <a:t>XGBoost</a:t>
             </a:r>
             <a:r>
+              <a:rPr lang="en-US" altLang="en-US" sz="1800" b="1" dirty="0">
+                <a:latin typeface="Arial" panose="020B0604020202020204" pitchFamily="34" charset="0"/>
+              </a:rPr>
+              <a:t>: </a:t>
+            </a:r>
+            <a:r>
+              <a:rPr kumimoji="0" lang="en-US" altLang="en-US" sz="1800" b="1" i="0" u="none" strike="noStrike" cap="none" normalizeH="0" baseline="0" dirty="0">
+                <a:ln>
+                  <a:noFill/>
+                </a:ln>
+                <a:solidFill>
+                  <a:schemeClr val="tx1"/>
+                </a:solidFill>
+                <a:effectLst/>
+                <a:latin typeface="Arial" panose="020B0604020202020204" pitchFamily="34" charset="0"/>
+              </a:rPr>
+              <a:t>the best overall</a:t>
+            </a:r>
+            <a:r>
               <a:rPr kumimoji="0" lang="en-US" altLang="en-US" sz="1800" b="0" i="0" u="none" strike="noStrike" cap="none" normalizeH="0" baseline="0" dirty="0">
                 <a:ln>
                   <a:noFill/>
@@ -18025,7 +18047,7 @@
             </a:r>
           </a:p>
           <a:p>
-            <a:pPr lvl="1" eaLnBrk="0" fontAlgn="base" hangingPunct="0">
+            <a:pPr eaLnBrk="0" fontAlgn="base" hangingPunct="0">
               <a:lnSpc>
                 <a:spcPct val="100000"/>
               </a:lnSpc>
@@ -18051,7 +18073,7 @@
             </a:r>
           </a:p>
           <a:p>
-            <a:pPr marL="0" marR="0" lvl="0" indent="0" algn="l" defTabSz="914400" rtl="0" eaLnBrk="0" fontAlgn="base" latinLnBrk="0" hangingPunct="0">
+            <a:pPr eaLnBrk="0" fontAlgn="base" hangingPunct="0">
               <a:lnSpc>
                 <a:spcPct val="100000"/>
               </a:lnSpc>
@@ -18061,11 +18083,58 @@
               <a:spcAft>
                 <a:spcPct val="0"/>
               </a:spcAft>
-              <a:buClrTx/>
-              <a:buSzTx/>
-              <a:buFontTx/>
-              <a:buChar char="•"/>
-              <a:tabLst/>
+            </a:pPr>
+            <a:r>
+              <a:rPr kumimoji="0" lang="en-US" altLang="en-US" sz="1800" b="0" i="0" u="none" strike="noStrike" cap="none" normalizeH="0" baseline="0" dirty="0">
+                <a:ln>
+                  <a:noFill/>
+                </a:ln>
+                <a:solidFill>
+                  <a:schemeClr val="tx1"/>
+                </a:solidFill>
+                <a:effectLst/>
+                <a:latin typeface="Arial" panose="020B0604020202020204" pitchFamily="34" charset="0"/>
+              </a:rPr>
+              <a:t>Strong balance between precision and recall</a:t>
+            </a:r>
+          </a:p>
+          <a:p>
+            <a:pPr eaLnBrk="0" fontAlgn="base" hangingPunct="0">
+              <a:lnSpc>
+                <a:spcPct val="100000"/>
+              </a:lnSpc>
+              <a:spcBef>
+                <a:spcPct val="0"/>
+              </a:spcBef>
+              <a:spcAft>
+                <a:spcPct val="0"/>
+              </a:spcAft>
+            </a:pPr>
+            <a:r>
+              <a:rPr kumimoji="0" lang="en-US" altLang="en-US" sz="1800" b="0" i="0" u="none" strike="noStrike" cap="none" normalizeH="0" baseline="0" dirty="0">
+                <a:ln>
+                  <a:noFill/>
+                </a:ln>
+                <a:solidFill>
+                  <a:schemeClr val="tx1"/>
+                </a:solidFill>
+                <a:effectLst/>
+                <a:latin typeface="Arial" panose="020B0604020202020204" pitchFamily="34" charset="0"/>
+              </a:rPr>
+              <a:t>Consistent results (no overfitting) </a:t>
+            </a:r>
+          </a:p>
+          <a:p>
+            <a:pPr eaLnBrk="0" fontAlgn="base" hangingPunct="0">
+              <a:lnSpc>
+                <a:spcPct val="100000"/>
+              </a:lnSpc>
+              <a:spcBef>
+                <a:spcPct val="0"/>
+              </a:spcBef>
+              <a:spcAft>
+                <a:spcPct val="0"/>
+              </a:spcAft>
             </a:pPr>
             <a:endParaRPr kumimoji="0" lang="en-US" altLang="en-US" sz="1800" b="0" i="0" u="none" strike="noStrike" cap="none" normalizeH="0" baseline="0" dirty="0">
               <a:ln>
@@ -18095,6 +18164,35 @@
               <a:tabLst/>
             </a:pPr>
             <a:r>
+              <a:rPr kumimoji="0" lang="en-US" altLang="en-US" sz="1800" b="1" i="0" u="none" strike="noStrike" cap="none" normalizeH="0" baseline="0" dirty="0">
+                <a:ln>
+                  <a:noFill/>
+                </a:ln>
+                <a:solidFill>
+                  <a:schemeClr val="tx1"/>
+                </a:solidFill>
+                <a:effectLst/>
+                <a:latin typeface="Arial" panose="020B0604020202020204" pitchFamily="34" charset="0"/>
+              </a:rPr>
+              <a:t>Bayesian Ensemble: the best ensemble model</a:t>
+            </a:r>
+            <a:endParaRPr lang="en-US" altLang="en-US" sz="1800" dirty="0">
+              <a:latin typeface="Arial" panose="020B0604020202020204" pitchFamily="34" charset="0"/>
+            </a:endParaRPr>
+          </a:p>
+          <a:p>
+            <a:pPr eaLnBrk="0" fontAlgn="base" hangingPunct="0">
+              <a:lnSpc>
+                <a:spcPct val="100000"/>
+              </a:lnSpc>
+              <a:spcBef>
+                <a:spcPct val="0"/>
+              </a:spcBef>
+              <a:spcAft>
+                <a:spcPct val="0"/>
+              </a:spcAft>
+            </a:pPr>
+            <a:r>
               <a:rPr kumimoji="0" lang="en-US" altLang="en-US" sz="1800" b="0" i="0" u="none" strike="noStrike" cap="none" normalizeH="0" baseline="0" dirty="0">
                 <a:ln>
                   <a:noFill/>
@@ -18105,11 +18203,11 @@
                 <a:effectLst/>
                 <a:latin typeface="Arial" panose="020B0604020202020204" pitchFamily="34" charset="0"/>
               </a:rPr>
-              <a:t>Key observations: </a:t>
-            </a:r>
-          </a:p>
-          <a:p>
-            <a:pPr lvl="1" eaLnBrk="0" fontAlgn="base" hangingPunct="0">
+              <a:t>Slightly better than Voting </a:t>
+            </a:r>
+          </a:p>
+          <a:p>
+            <a:pPr eaLnBrk="0" fontAlgn="base" hangingPunct="0">
               <a:lnSpc>
                 <a:spcPct val="100000"/>
               </a:lnSpc>
@@ -18131,11 +18229,11 @@
                 <a:effectLst/>
                 <a:latin typeface="Arial" panose="020B0604020202020204" pitchFamily="34" charset="0"/>
               </a:rPr>
-              <a:t>Random Forest → high precision, low recall </a:t>
-            </a:r>
-          </a:p>
-          <a:p>
-            <a:pPr lvl="1" eaLnBrk="0" fontAlgn="base" hangingPunct="0">
+              <a:t>More stable predictions </a:t>
+            </a:r>
+          </a:p>
+          <a:p>
+            <a:pPr eaLnBrk="0" fontAlgn="base" hangingPunct="0">
               <a:lnSpc>
                 <a:spcPct val="100000"/>
               </a:lnSpc>
@@ -18157,11 +18255,37 @@
                 <a:effectLst/>
                 <a:latin typeface="Arial" panose="020B0604020202020204" pitchFamily="34" charset="0"/>
               </a:rPr>
-              <a:t>Decision Tree → balanced performance </a:t>
-            </a:r>
-          </a:p>
-          <a:p>
-            <a:pPr lvl="1" eaLnBrk="0" fontAlgn="base" hangingPunct="0">
+              <a:t>Still slightly lower than </a:t>
+            </a:r>
+            <a:r>
+              <a:rPr kumimoji="0" lang="en-US" altLang="en-US" sz="1800" b="0" i="0" u="none" strike="noStrike" cap="none" normalizeH="0" baseline="0" dirty="0" err="1">
+                <a:ln>
+                  <a:noFill/>
+                </a:ln>
+                <a:solidFill>
+                  <a:schemeClr val="tx1"/>
+                </a:solidFill>
+                <a:effectLst/>
+                <a:latin typeface="Arial" panose="020B0604020202020204" pitchFamily="34" charset="0"/>
+              </a:rPr>
+              <a:t>XGBoost</a:t>
+            </a:r>
+            <a:r>
+              <a:rPr kumimoji="0" lang="en-US" altLang="en-US" sz="1800" b="0" i="0" u="none" strike="noStrike" cap="none" normalizeH="0" baseline="0" dirty="0">
+                <a:ln>
+                  <a:noFill/>
+                </a:ln>
+                <a:solidFill>
+                  <a:schemeClr val="tx1"/>
+                </a:solidFill>
+                <a:effectLst/>
+                <a:latin typeface="Arial" panose="020B0604020202020204" pitchFamily="34" charset="0"/>
+              </a:rPr>
+              <a:t> </a:t>
+            </a:r>
+          </a:p>
+          <a:p>
+            <a:pPr eaLnBrk="0" fontAlgn="base" hangingPunct="0">
               <a:lnSpc>
                 <a:spcPct val="100000"/>
               </a:lnSpc>
@@ -18172,19 +18296,16 @@
                 <a:spcPct val="0"/>
               </a:spcAft>
             </a:pPr>
-            <a:r>
-              <a:rPr kumimoji="0" lang="en-US" altLang="en-US" sz="1800" b="0" i="0" u="none" strike="noStrike" cap="none" normalizeH="0" baseline="0" dirty="0">
-                <a:ln>
-                  <a:noFill/>
-                </a:ln>
-                <a:solidFill>
-                  <a:schemeClr val="tx1"/>
-                </a:solidFill>
-                <a:effectLst/>
-                <a:latin typeface="Arial" panose="020B0604020202020204" pitchFamily="34" charset="0"/>
-              </a:rPr>
-              <a:t>KNN &amp; Logistic Regression → lower performance </a:t>
-            </a:r>
+            <a:endParaRPr kumimoji="0" lang="en-US" altLang="en-US" sz="1800" b="0" i="0" u="none" strike="noStrike" cap="none" normalizeH="0" baseline="0" dirty="0">
+              <a:ln>
+                <a:noFill/>
+              </a:ln>
+              <a:solidFill>
+                <a:schemeClr val="tx1"/>
+              </a:solidFill>
+              <a:effectLst/>
+              <a:latin typeface="Arial" panose="020B0604020202020204" pitchFamily="34" charset="0"/>
+            </a:endParaRPr>
           </a:p>
           <a:p>
             <a:pPr marL="0" marR="0" lvl="0" indent="0" algn="l" defTabSz="914400" rtl="0" eaLnBrk="0" fontAlgn="base" latinLnBrk="0" hangingPunct="0">
@@ -18202,16 +18323,74 @@
               <a:buNone/>
               <a:tabLst/>
             </a:pPr>
-            <a:endParaRPr kumimoji="0" lang="en-US" altLang="en-US" sz="1800" b="0" i="0" u="none" strike="noStrike" cap="none" normalizeH="0" baseline="0" dirty="0">
-              <a:ln>
-                <a:noFill/>
-              </a:ln>
-              <a:solidFill>
-                <a:schemeClr val="tx1"/>
-              </a:solidFill>
-              <a:effectLst/>
+            <a:r>
+              <a:rPr kumimoji="0" lang="en-US" altLang="en-US" sz="1800" b="1" i="0" u="none" strike="noStrike" cap="none" normalizeH="0" baseline="0" dirty="0">
+                <a:ln>
+                  <a:noFill/>
+                </a:ln>
+                <a:solidFill>
+                  <a:schemeClr val="tx1"/>
+                </a:solidFill>
+                <a:effectLst/>
+                <a:latin typeface="Arial" panose="020B0604020202020204" pitchFamily="34" charset="0"/>
+              </a:rPr>
+              <a:t>Voting Ensemble: solid performance</a:t>
+            </a:r>
+            <a:endParaRPr lang="en-US" altLang="en-US" sz="1800" dirty="0">
               <a:latin typeface="Arial" panose="020B0604020202020204" pitchFamily="34" charset="0"/>
             </a:endParaRPr>
+          </a:p>
+          <a:p>
+            <a:pPr eaLnBrk="0" fontAlgn="base" hangingPunct="0">
+              <a:lnSpc>
+                <a:spcPct val="100000"/>
+              </a:lnSpc>
+              <a:spcBef>
+                <a:spcPct val="0"/>
+              </a:spcBef>
+              <a:spcAft>
+                <a:spcPct val="0"/>
+              </a:spcAft>
+            </a:pPr>
+            <a:r>
+              <a:rPr kumimoji="0" lang="en-US" altLang="en-US" sz="1800" b="0" i="0" u="none" strike="noStrike" cap="none" normalizeH="0" baseline="0" dirty="0">
+                <a:ln>
+                  <a:noFill/>
+                </a:ln>
+                <a:solidFill>
+                  <a:schemeClr val="tx1"/>
+                </a:solidFill>
+                <a:effectLst/>
+                <a:latin typeface="Arial" panose="020B0604020202020204" pitchFamily="34" charset="0"/>
+              </a:rPr>
+              <a:t>Improved over weaker models </a:t>
+            </a:r>
+          </a:p>
+          <a:p>
+            <a:pPr eaLnBrk="0" fontAlgn="base" hangingPunct="0">
+              <a:lnSpc>
+                <a:spcPct val="100000"/>
+              </a:lnSpc>
+              <a:spcBef>
+                <a:spcPct val="0"/>
+              </a:spcBef>
+              <a:spcAft>
+                <a:spcPct val="0"/>
+              </a:spcAft>
+            </a:pPr>
+            <a:r>
+              <a:rPr kumimoji="0" lang="en-US" altLang="en-US" sz="1800" b="0" i="0" u="none" strike="noStrike" cap="none" normalizeH="0" baseline="0" dirty="0">
+                <a:ln>
+                  <a:noFill/>
+                </a:ln>
+                <a:solidFill>
+                  <a:schemeClr val="tx1"/>
+                </a:solidFill>
+                <a:effectLst/>
+                <a:latin typeface="Arial" panose="020B0604020202020204" pitchFamily="34" charset="0"/>
+              </a:rPr>
+              <a:t>Less effective than Bayesian </a:t>
+            </a:r>
           </a:p>
           <a:p>
             <a:pPr marL="0" marR="0" lvl="0" indent="0" algn="l" defTabSz="914400" rtl="0" eaLnBrk="0" fontAlgn="base" latinLnBrk="0" hangingPunct="0">
@@ -18229,97 +18408,16 @@
               <a:buNone/>
               <a:tabLst/>
             </a:pPr>
-            <a:r>
-              <a:rPr kumimoji="0" lang="en-US" altLang="en-US" sz="1800" b="0" i="0" u="none" strike="noStrike" cap="none" normalizeH="0" baseline="0" dirty="0">
-                <a:ln>
-                  <a:noFill/>
-                </a:ln>
-                <a:solidFill>
-                  <a:schemeClr val="tx1"/>
-                </a:solidFill>
-                <a:effectLst/>
-                <a:latin typeface="Arial" panose="020B0604020202020204" pitchFamily="34" charset="0"/>
-              </a:rPr>
-              <a:t>Visualization used: </a:t>
-            </a:r>
-          </a:p>
-          <a:p>
-            <a:pPr lvl="1" eaLnBrk="0" fontAlgn="base" hangingPunct="0">
-              <a:lnSpc>
-                <a:spcPct val="100000"/>
-              </a:lnSpc>
-              <a:spcBef>
-                <a:spcPct val="0"/>
-              </a:spcBef>
-              <a:spcAft>
-                <a:spcPct val="0"/>
-              </a:spcAft>
-            </a:pPr>
-            <a:r>
-              <a:rPr kumimoji="0" lang="en-US" altLang="en-US" sz="1800" b="0" i="0" u="none" strike="noStrike" cap="none" normalizeH="0" baseline="0" dirty="0">
-                <a:ln>
-                  <a:noFill/>
-                </a:ln>
-                <a:solidFill>
-                  <a:schemeClr val="tx1"/>
-                </a:solidFill>
-                <a:effectLst/>
-                <a:latin typeface="Arial" panose="020B0604020202020204" pitchFamily="34" charset="0"/>
-              </a:rPr>
-              <a:t>ROC curves </a:t>
-            </a:r>
-          </a:p>
-          <a:p>
-            <a:pPr lvl="1" eaLnBrk="0" fontAlgn="base" hangingPunct="0">
-              <a:lnSpc>
-                <a:spcPct val="100000"/>
-              </a:lnSpc>
-              <a:spcBef>
-                <a:spcPct val="0"/>
-              </a:spcBef>
-              <a:spcAft>
-                <a:spcPct val="0"/>
-              </a:spcAft>
-            </a:pPr>
-            <a:r>
-              <a:rPr kumimoji="0" lang="en-US" altLang="en-US" sz="1800" b="0" i="0" u="none" strike="noStrike" cap="none" normalizeH="0" baseline="0" dirty="0">
-                <a:ln>
-                  <a:noFill/>
-                </a:ln>
-                <a:solidFill>
-                  <a:schemeClr val="tx1"/>
-                </a:solidFill>
-                <a:effectLst/>
-                <a:latin typeface="Arial" panose="020B0604020202020204" pitchFamily="34" charset="0"/>
-              </a:rPr>
-              <a:t>Confusion matrices </a:t>
-            </a:r>
-          </a:p>
-          <a:p>
-            <a:pPr lvl="1" eaLnBrk="0" fontAlgn="base" hangingPunct="0">
-              <a:lnSpc>
-                <a:spcPct val="100000"/>
-              </a:lnSpc>
-              <a:spcBef>
-                <a:spcPct val="0"/>
-              </a:spcBef>
-              <a:spcAft>
-                <a:spcPct val="0"/>
-              </a:spcAft>
-            </a:pPr>
-            <a:r>
-              <a:rPr kumimoji="0" lang="en-US" altLang="en-US" sz="1800" b="0" i="0" u="none" strike="noStrike" cap="none" normalizeH="0" baseline="0" dirty="0">
-                <a:ln>
-                  <a:noFill/>
-                </a:ln>
-                <a:solidFill>
-                  <a:schemeClr val="tx1"/>
-                </a:solidFill>
-                <a:effectLst/>
-                <a:latin typeface="Arial" panose="020B0604020202020204" pitchFamily="34" charset="0"/>
-              </a:rPr>
-              <a:t>Bar charts</a:t>
-            </a:r>
+            <a:endParaRPr kumimoji="0" lang="en-US" altLang="en-US" sz="1800" b="1" i="0" u="none" strike="noStrike" cap="none" normalizeH="0" baseline="0" dirty="0">
+              <a:ln>
+                <a:noFill/>
+              </a:ln>
+              <a:solidFill>
+                <a:schemeClr val="tx1"/>
+              </a:solidFill>
+              <a:effectLst/>
+              <a:latin typeface="Arial" panose="020B0604020202020204" pitchFamily="34" charset="0"/>
+            </a:endParaRPr>
           </a:p>
           <a:p>
             <a:pPr marL="0" marR="0" lvl="0" indent="0" algn="l" defTabSz="914400" rtl="0" eaLnBrk="0" fontAlgn="base" latinLnBrk="0" hangingPunct="0">
@@ -18351,43 +18449,88 @@
           </a:p>
         </p:txBody>
       </p:sp>
-      <p:pic>
-        <p:nvPicPr>
-          <p:cNvPr id="6" name="Picture 5">
-            <a:extLst>
-              <a:ext uri="{FF2B5EF4-FFF2-40B4-BE49-F238E27FC236}">
-                <a16:creationId xmlns:a16="http://schemas.microsoft.com/office/drawing/2014/main" id="{5379C7D3-6219-7EDE-6E26-B6B542EB19D9}"/>
-              </a:ext>
-            </a:extLst>
-          </p:cNvPr>
-          <p:cNvPicPr>
-            <a:picLocks noChangeAspect="1"/>
-          </p:cNvPicPr>
+      <p:sp>
+        <p:nvSpPr>
+          <p:cNvPr id="8" name="TextBox 7">
+            <a:extLst>
+              <a:ext uri="{FF2B5EF4-FFF2-40B4-BE49-F238E27FC236}">
+                <a16:creationId xmlns:a16="http://schemas.microsoft.com/office/drawing/2014/main" id="{F7A69143-C29F-9C2F-41A3-D5A05FD7C207}"/>
+              </a:ext>
+            </a:extLst>
+          </p:cNvPr>
+          <p:cNvSpPr txBox="1"/>
           <p:nvPr/>
-        </p:nvPicPr>
-        <p:blipFill>
-          <a:blip r:embed="rId2">
-            <a:extLst>
-              <a:ext uri="{28A0092B-C50C-407E-A947-70E740481C1C}">
-                <a14:useLocalDpi xmlns:a14="http://schemas.microsoft.com/office/drawing/2010/main" val="0"/>
-              </a:ext>
-            </a:extLst>
-          </a:blip>
-          <a:srcRect r="8884" b="9737"/>
-          <a:stretch>
-            <a:fillRect/>
-          </a:stretch>
-        </p:blipFill>
-        <p:spPr>
-          <a:xfrm>
-            <a:off x="6669619" y="1743859"/>
-            <a:ext cx="5375309" cy="3437741"/>
+        </p:nvSpPr>
+        <p:spPr>
+          <a:xfrm>
+            <a:off x="6248400" y="1600200"/>
+            <a:ext cx="6096000" cy="1754326"/>
           </a:xfrm>
           <a:prstGeom prst="rect">
             <a:avLst/>
           </a:prstGeom>
-        </p:spPr>
-      </p:pic>
+          <a:noFill/>
+        </p:spPr>
+        <p:txBody>
+          <a:bodyPr wrap="square">
+            <a:spAutoFit/>
+          </a:bodyPr>
+          <a:lstStyle/>
+          <a:p>
+            <a:r>
+              <a:rPr lang="en-US" b="1" dirty="0"/>
+              <a:t>Decision Tree and KNN (top3 single model)</a:t>
+            </a:r>
+          </a:p>
+          <a:p>
+            <a:pPr marL="285750" indent="-285750">
+              <a:buFont typeface="Arial" panose="020B0604020202020204" pitchFamily="34" charset="0"/>
+              <a:buChar char="•"/>
+            </a:pPr>
+            <a:r>
+              <a:rPr lang="en-US" dirty="0"/>
+              <a:t>Balanced performance </a:t>
+            </a:r>
+          </a:p>
+          <a:p>
+            <a:pPr marL="285750" indent="-285750">
+              <a:buFont typeface="Arial" panose="020B0604020202020204" pitchFamily="34" charset="0"/>
+              <a:buChar char="•"/>
+            </a:pPr>
+            <a:r>
+              <a:rPr lang="en-US" dirty="0"/>
+              <a:t>Lower overall scores than </a:t>
+            </a:r>
+            <a:r>
+              <a:rPr lang="en-US" dirty="0" err="1"/>
+              <a:t>XGBoost</a:t>
+            </a:r>
+            <a:r>
+              <a:rPr lang="en-US" dirty="0"/>
+              <a:t> </a:t>
+            </a:r>
+          </a:p>
+          <a:p>
+            <a:endParaRPr lang="en-US" dirty="0"/>
+          </a:p>
+          <a:p>
+            <a:r>
+              <a:rPr lang="en-US" b="1" dirty="0"/>
+              <a:t>SVC and Logistic Regression: the worst </a:t>
+            </a:r>
+          </a:p>
+          <a:p>
+            <a:pPr marL="285750" indent="-285750">
+              <a:buFont typeface="Arial" panose="020B0604020202020204" pitchFamily="34" charset="0"/>
+              <a:buChar char="•"/>
+            </a:pPr>
+            <a:r>
+              <a:rPr lang="en-US" dirty="0"/>
+              <a:t>Lower F1-score and ROC-AUC </a:t>
+            </a:r>
+          </a:p>
+        </p:txBody>
+      </p:sp>
     </p:spTree>
     <p:extLst>
       <p:ext uri="{BB962C8B-B14F-4D97-AF65-F5344CB8AC3E}">
@@ -18479,67 +18622,100 @@
           </a:bodyPr>
           <a:lstStyle/>
           <a:p>
-            <a:r>
-              <a:rPr lang="en-US" dirty="0"/>
+            <a:pPr marL="0" indent="0">
+              <a:buNone/>
+            </a:pPr>
+            <a:r>
+              <a:rPr lang="en-US" sz="1800" dirty="0">
+                <a:latin typeface="Arial" panose="020B0604020202020204" pitchFamily="34" charset="0"/>
+                <a:cs typeface="Arial" panose="020B0604020202020204" pitchFamily="34" charset="0"/>
+              </a:rPr>
               <a:t>Top 3 Models: </a:t>
             </a:r>
           </a:p>
           <a:p>
             <a:pPr lvl="1"/>
             <a:r>
-              <a:rPr lang="en-US" dirty="0" err="1"/>
+              <a:rPr lang="en-US" sz="1800" dirty="0" err="1">
+                <a:latin typeface="Arial" panose="020B0604020202020204" pitchFamily="34" charset="0"/>
+                <a:cs typeface="Arial" panose="020B0604020202020204" pitchFamily="34" charset="0"/>
+              </a:rPr>
               <a:t>XGBoost</a:t>
             </a:r>
             <a:r>
-              <a:rPr lang="en-US" dirty="0"/>
+              <a:rPr lang="en-US" sz="1800" dirty="0">
+                <a:latin typeface="Arial" panose="020B0604020202020204" pitchFamily="34" charset="0"/>
+                <a:cs typeface="Arial" panose="020B0604020202020204" pitchFamily="34" charset="0"/>
+              </a:rPr>
               <a:t> </a:t>
             </a:r>
           </a:p>
           <a:p>
             <a:pPr lvl="1"/>
             <a:r>
-              <a:rPr lang="en-US" dirty="0"/>
-              <a:t>Random forest</a:t>
+              <a:rPr lang="en-US" sz="1800" dirty="0">
+                <a:latin typeface="Arial" panose="020B0604020202020204" pitchFamily="34" charset="0"/>
+                <a:cs typeface="Arial" panose="020B0604020202020204" pitchFamily="34" charset="0"/>
+              </a:rPr>
+              <a:t>Decision Tree</a:t>
             </a:r>
           </a:p>
           <a:p>
             <a:pPr lvl="1"/>
             <a:r>
-              <a:rPr lang="en-US" dirty="0"/>
-              <a:t>SVC</a:t>
-            </a:r>
-          </a:p>
-          <a:p>
-            <a:r>
-              <a:rPr lang="en-US" dirty="0"/>
-              <a:t>Ensemble Methods: </a:t>
+              <a:rPr lang="en-US" sz="1800" dirty="0">
+                <a:latin typeface="Arial" panose="020B0604020202020204" pitchFamily="34" charset="0"/>
+                <a:cs typeface="Arial" panose="020B0604020202020204" pitchFamily="34" charset="0"/>
+              </a:rPr>
+              <a:t>KNN</a:t>
+            </a:r>
+          </a:p>
+          <a:p>
+            <a:pPr marL="0" indent="0">
+              <a:buNone/>
+            </a:pPr>
+            <a:r>
+              <a:rPr lang="en-US" sz="1800" dirty="0">
+                <a:latin typeface="Arial" panose="020B0604020202020204" pitchFamily="34" charset="0"/>
+                <a:cs typeface="Arial" panose="020B0604020202020204" pitchFamily="34" charset="0"/>
+              </a:rPr>
+              <a:t>Ensemble Models: </a:t>
             </a:r>
           </a:p>
           <a:p>
             <a:pPr lvl="1"/>
             <a:r>
-              <a:rPr lang="en-US" dirty="0"/>
+              <a:rPr lang="en-US" sz="1800" dirty="0">
+                <a:latin typeface="Arial" panose="020B0604020202020204" pitchFamily="34" charset="0"/>
+                <a:cs typeface="Arial" panose="020B0604020202020204" pitchFamily="34" charset="0"/>
+              </a:rPr>
+              <a:t>Bayesian (weighted average) </a:t>
+            </a:r>
+          </a:p>
+          <a:p>
+            <a:pPr lvl="1"/>
+            <a:r>
+              <a:rPr lang="en-US" sz="1800" dirty="0">
+                <a:latin typeface="Arial" panose="020B0604020202020204" pitchFamily="34" charset="0"/>
+                <a:cs typeface="Arial" panose="020B0604020202020204" pitchFamily="34" charset="0"/>
+              </a:rPr>
               <a:t>Voting Classifier </a:t>
             </a:r>
           </a:p>
           <a:p>
-            <a:pPr lvl="1"/>
-            <a:r>
-              <a:rPr lang="en-US" dirty="0"/>
-              <a:t>Bayesian (weighted average) </a:t>
-            </a:r>
-          </a:p>
-          <a:p>
-            <a:endParaRPr lang="en-US" dirty="0"/>
-          </a:p>
-        </p:txBody>
-      </p:sp>
-      <p:sp>
-        <p:nvSpPr>
-          <p:cNvPr id="4" name="TextBox 3">
-            <a:extLst>
-              <a:ext uri="{FF2B5EF4-FFF2-40B4-BE49-F238E27FC236}">
-                <a16:creationId xmlns:a16="http://schemas.microsoft.com/office/drawing/2014/main" id="{7C28C768-1447-423E-CA1D-397B493862ED}"/>
+            <a:endParaRPr lang="en-US" sz="1800" dirty="0">
+              <a:latin typeface="Arial" panose="020B0604020202020204" pitchFamily="34" charset="0"/>
+              <a:cs typeface="Arial" panose="020B0604020202020204" pitchFamily="34" charset="0"/>
+            </a:endParaRPr>
+          </a:p>
+        </p:txBody>
+      </p:sp>
+      <p:sp>
+        <p:nvSpPr>
+          <p:cNvPr id="5" name="TextBox 4">
+            <a:extLst>
+              <a:ext uri="{FF2B5EF4-FFF2-40B4-BE49-F238E27FC236}">
+                <a16:creationId xmlns:a16="http://schemas.microsoft.com/office/drawing/2014/main" id="{98B1C8EF-3C79-C128-6738-229D1FC00B88}"/>
               </a:ext>
             </a:extLst>
           </p:cNvPr>
@@ -18548,8 +18724,8 @@
         </p:nvSpPr>
         <p:spPr>
           <a:xfrm>
-            <a:off x="5943600" y="1828800"/>
-            <a:ext cx="5410200" cy="2246769"/>
+            <a:off x="5715000" y="1669026"/>
+            <a:ext cx="6096000" cy="2585323"/>
           </a:xfrm>
           <a:prstGeom prst="rect">
             <a:avLst/>
@@ -18557,64 +18733,74 @@
           <a:noFill/>
         </p:spPr>
         <p:txBody>
-          <a:bodyPr wrap="square" rtlCol="0">
+          <a:bodyPr wrap="square">
             <a:spAutoFit/>
           </a:bodyPr>
           <a:lstStyle/>
           <a:p>
             <a:r>
-              <a:rPr lang="en-US" sz="1400" dirty="0"/>
-              <a:t>Result</a:t>
-            </a:r>
-            <a:r>
-              <a:rPr lang="en-US" sz="1400"/>
-              <a:t>: </a:t>
-            </a:r>
-          </a:p>
-          <a:p>
-            <a:endParaRPr lang="en-US" sz="1400" dirty="0"/>
-          </a:p>
-          <a:p>
-            <a:pPr lvl="1"/>
-            <a:r>
-              <a:rPr lang="en-US" sz="1400" dirty="0"/>
-              <a:t>Ensemble improved stability and overall performance </a:t>
-            </a:r>
-          </a:p>
-          <a:p>
-            <a:pPr lvl="1"/>
-            <a:r>
-              <a:rPr lang="en-US" sz="1400" dirty="0"/>
-              <a:t>Better generalization on test data </a:t>
-            </a:r>
-          </a:p>
-          <a:p>
-            <a:pPr lvl="1"/>
-            <a:endParaRPr lang="en-US" sz="1400" dirty="0"/>
-          </a:p>
-          <a:p>
-            <a:r>
-              <a:rPr lang="en-US" sz="1400" b="1" dirty="0"/>
-              <a:t>Conclusion:</a:t>
-            </a:r>
-          </a:p>
-          <a:p>
-            <a:endParaRPr lang="en-US" sz="1400" dirty="0"/>
-          </a:p>
-          <a:p>
-            <a:r>
-              <a:rPr lang="en-US" sz="1400" dirty="0"/>
-              <a:t>Combining models gives more reliable predictions </a:t>
-            </a:r>
-          </a:p>
-          <a:p>
-            <a:r>
-              <a:rPr lang="en-US" sz="1400" dirty="0"/>
-              <a:t>Ensemble methods outperform single models</a:t>
-            </a:r>
-          </a:p>
-          <a:p>
-            <a:endParaRPr lang="en-US" sz="1400" dirty="0"/>
+              <a:rPr lang="en-US" dirty="0"/>
+              <a:t>Ensemble Results</a:t>
+            </a:r>
+          </a:p>
+          <a:p>
+            <a:endParaRPr lang="en-US" dirty="0"/>
+          </a:p>
+          <a:p>
+            <a:pPr marL="285750" indent="-285750">
+              <a:buFont typeface="Arial" panose="020B0604020202020204" pitchFamily="34" charset="0"/>
+              <a:buChar char="•"/>
+            </a:pPr>
+            <a:r>
+              <a:rPr lang="en-US" dirty="0"/>
+              <a:t>Bayesian &gt; Voting</a:t>
+            </a:r>
+          </a:p>
+          <a:p>
+            <a:pPr marL="285750" indent="-285750">
+              <a:buFont typeface="Arial" panose="020B0604020202020204" pitchFamily="34" charset="0"/>
+              <a:buChar char="•"/>
+            </a:pPr>
+            <a:r>
+              <a:rPr lang="en-US" dirty="0" err="1"/>
+              <a:t>XGBoost</a:t>
+            </a:r>
+            <a:r>
+              <a:rPr lang="en-US" dirty="0"/>
+              <a:t> still best overall</a:t>
+            </a:r>
+          </a:p>
+          <a:p>
+            <a:endParaRPr lang="en-US" dirty="0"/>
+          </a:p>
+          <a:p>
+            <a:r>
+              <a:rPr lang="en-US" dirty="0"/>
+              <a:t>Key Takeaway</a:t>
+            </a:r>
+          </a:p>
+          <a:p>
+            <a:endParaRPr lang="en-US" dirty="0"/>
+          </a:p>
+          <a:p>
+            <a:pPr marL="285750" indent="-285750">
+              <a:buFont typeface="Arial" panose="020B0604020202020204" pitchFamily="34" charset="0"/>
+              <a:buChar char="•"/>
+            </a:pPr>
+            <a:r>
+              <a:rPr lang="en-US" dirty="0"/>
+              <a:t>Ensemble improves performance</a:t>
+            </a:r>
+          </a:p>
+          <a:p>
+            <a:pPr marL="285750" indent="-285750">
+              <a:buFont typeface="Arial" panose="020B0604020202020204" pitchFamily="34" charset="0"/>
+              <a:buChar char="•"/>
+            </a:pPr>
+            <a:r>
+              <a:rPr lang="en-US" dirty="0"/>
+              <a:t>Strong single model can still outperform ensemble</a:t>
+            </a:r>
           </a:p>
         </p:txBody>
       </p:sp>
